--- a/deck.pptx
+++ b/deck.pptx
@@ -3266,8 +3266,8 @@
         </p:nvSpPr>
         <p:spPr>
           <a:xfrm>
-            <a:off x="2705032" y="2007938"/>
-            <a:ext cx="3238418" cy="3382927"/>
+            <a:off x="2317510" y="1870578"/>
+            <a:ext cx="3608524" cy="3769548"/>
           </a:xfrm>
           <a:prstGeom prst="rect">
             <a:avLst/>
@@ -3314,8 +3314,8 @@
         </p:nvSpPr>
         <p:spPr>
           <a:xfrm>
-            <a:off x="6248243" y="2007938"/>
-            <a:ext cx="3238418" cy="3382927"/>
+            <a:off x="6265660" y="1870578"/>
+            <a:ext cx="3608524" cy="3769548"/>
           </a:xfrm>
           <a:prstGeom prst="rect">
             <a:avLst/>
@@ -3404,8 +3404,8 @@
         </p:nvSpPr>
         <p:spPr>
           <a:xfrm>
-            <a:off x="857228" y="4775626"/>
-            <a:ext cx="1758509" cy="390515"/>
+            <a:off x="258529" y="4954581"/>
+            <a:ext cx="1959481" cy="435145"/>
           </a:xfrm>
           <a:prstGeom prst="rect">
             <a:avLst/>
